--- a/lecons/USA/Economic Geography/01_USA_ECO_L01_Natural_Resources.pptx
+++ b/lecons/USA/Economic Geography/01_USA_ECO_L01_Natural_Resources.pptx
@@ -3458,7 +3458,7 @@
           <a:p>
             <a:r>
               <a:rPr lang="en-US" dirty="0"/>
-              <a:t>Before we start the new lesson, let us correct the homework I gave you at the end of Further Study 1: Urbanisation in Cameroon. The question was: Draw the site of Douala or Yaoundé and list three problems of the town. Take out your exercise books.</a:t>
+              <a:t>Before we start the new lesson, let us correct the homework I gave you at the end of Lesson 22: Controlling Town Spread. The question was: List three natural resources found in Cameroon. Take out your exercise books.</a:t>
             </a:r>
             <a:endParaRPr lang="en-US" dirty="0"/>
           </a:p>
@@ -4426,7 +4426,7 @@
           <a:p>
             <a:r>
               <a:rPr lang="en-US" dirty="0"/>
-              <a:t>Here is a good answer. Douala: low, swampy site on the Wouri estuary. Problems: floods, traffic jams and unplanned quarters (e.g. slums near swamps). Compare it with your own answer and correct your work in red.</a:t>
+              <a:t>Here is a good answer. Examples: forests, oil, gas, bauxite, iron ore, rivers, fertile soils (any three). Compare it with your own answer and correct your work in red.</a:t>
             </a:r>
             <a:endParaRPr lang="en-US" dirty="0"/>
           </a:p>
@@ -14923,7 +14923,7 @@
                 <a:ea typeface="Times New Roman" pitchFamily="34" charset="-122"/>
                 <a:cs typeface="Times New Roman" pitchFamily="34" charset="-120"/>
               </a:rPr>
-              <a:t>Question (Further Study 1: Urbanisation in Cameroon):</a:t>
+              <a:t>Question (Lesson 22: Controlling Town Spread):</a:t>
             </a:r>
             <a:endParaRPr lang="en-US" sz="4000" dirty="0"/>
           </a:p>
@@ -14943,7 +14943,7 @@
                 <a:ea typeface="Times New Roman" pitchFamily="34" charset="-122"/>
                 <a:cs typeface="Times New Roman" pitchFamily="34" charset="-120"/>
               </a:rPr>
-              <a:t>Draw the site of Douala or Yaoundé and list three problems of the town.</a:t>
+              <a:t>List three natural resources found in Cameroon.</a:t>
             </a:r>
             <a:endParaRPr lang="en-US" sz="4000" dirty="0"/>
           </a:p>
@@ -18400,7 +18400,7 @@
                 <a:ea typeface="Times New Roman" pitchFamily="34" charset="-122"/>
                 <a:cs typeface="Times New Roman" pitchFamily="34" charset="-120"/>
               </a:rPr>
-              <a:t>Douala: low, swampy site on the Wouri estuary. Problems: floods, traffic jams and unplanned quarters (e.g. slums near swamps).</a:t>
+              <a:t>Examples: forests, oil, gas, bauxite, iron ore, rivers, fertile soils (any three).</a:t>
             </a:r>
             <a:endParaRPr lang="en-US" sz="4000" dirty="0"/>
           </a:p>
